--- a/presentation.pptx
+++ b/presentation.pptx
@@ -5,16 +5,15 @@
     <p:sldMasterId id="2147483648" r:id="rId1"/>
   </p:sldMasterIdLst>
   <p:sldIdLst>
-    <p:sldId id="256" r:id="rId7"/>
-    <p:sldId id="257" r:id="rId8"/>
-    <p:sldId id="258" r:id="rId9"/>
-    <p:sldId id="259" r:id="rId10"/>
-    <p:sldId id="260" r:id="rId11"/>
-    <p:sldId id="261" r:id="rId12"/>
-    <p:sldId id="262" r:id="rId13"/>
-    <p:sldId id="263" r:id="rId14"/>
+    <p:sldId id="256" r:id="rId2"/>
+    <p:sldId id="257" r:id="rId3"/>
+    <p:sldId id="258" r:id="rId4"/>
+    <p:sldId id="259" r:id="rId5"/>
+    <p:sldId id="260" r:id="rId6"/>
+    <p:sldId id="261" r:id="rId7"/>
+    <p:sldId id="263" r:id="rId8"/>
   </p:sldIdLst>
-  <p:sldSz cx="9144000" cy="5143500" type="screen4x3"/>
+  <p:sldSz cx="9144000" cy="5143500" type="screen16x9"/>
   <p:notesSz cx="6858000" cy="9144000"/>
   <p:defaultTextStyle>
     <a:defPPr>
@@ -111,6 +110,22 @@
       </a:defRPr>
     </a:lvl9pPr>
   </p:defaultTextStyle>
+  <p:extLst>
+    <p:ext uri="{EFAFB233-063F-42B5-8137-9DF3F51BA10A}">
+      <p15:sldGuideLst xmlns:p15="http://schemas.microsoft.com/office/powerpoint/2012/main">
+        <p15:guide id="1" orient="horz" pos="2160">
+          <p15:clr>
+            <a:srgbClr val="A4A3A4"/>
+          </p15:clr>
+        </p15:guide>
+        <p15:guide id="2" pos="2880">
+          <p15:clr>
+            <a:srgbClr val="A4A3A4"/>
+          </p15:clr>
+        </p15:guide>
+      </p15:sldGuideLst>
+    </p:ext>
+  </p:extLst>
 </p:presentation>
 </file>
 
@@ -152,10 +167,9 @@
           <a:lstStyle/>
           <a:p>
             <a:r>
-              <a:rPr lang="en-US" smtClean="0"/>
+              <a:rPr lang="en-US"/>
               <a:t>Click to edit Master title style</a:t>
             </a:r>
-            <a:endParaRPr lang="en-US"/>
           </a:p>
         </p:txBody>
       </p:sp>
@@ -271,10 +285,9 @@
           </a:lstStyle>
           <a:p>
             <a:r>
-              <a:rPr lang="en-US" smtClean="0"/>
+              <a:rPr lang="en-US"/>
               <a:t>Click to edit Master subtitle style</a:t>
             </a:r>
-            <a:endParaRPr lang="en-US"/>
           </a:p>
         </p:txBody>
       </p:sp>
@@ -295,7 +308,7 @@
           <a:p>
             <a:fld id="{5BCAD085-E8A6-8845-BD4E-CB4CCA059FC4}" type="datetimeFigureOut">
               <a:rPr lang="en-US" smtClean="0"/>
-              <a:t>1/27/13</a:t>
+              <a:t>4/19/26</a:t>
             </a:fld>
             <a:endParaRPr lang="en-US"/>
           </a:p>
@@ -389,10 +402,9 @@
           <a:lstStyle/>
           <a:p>
             <a:r>
-              <a:rPr lang="en-US" smtClean="0"/>
+              <a:rPr lang="en-US"/>
               <a:t>Click to edit Master title style</a:t>
             </a:r>
-            <a:endParaRPr lang="en-US"/>
           </a:p>
         </p:txBody>
       </p:sp>
@@ -413,38 +425,37 @@
           <a:p>
             <a:pPr lvl="0"/>
             <a:r>
-              <a:rPr lang="en-US" smtClean="0"/>
+              <a:rPr lang="en-US"/>
               <a:t>Click to edit Master text styles</a:t>
             </a:r>
           </a:p>
           <a:p>
             <a:pPr lvl="1"/>
             <a:r>
-              <a:rPr lang="en-US" smtClean="0"/>
+              <a:rPr lang="en-US"/>
               <a:t>Second level</a:t>
             </a:r>
           </a:p>
           <a:p>
             <a:pPr lvl="2"/>
             <a:r>
-              <a:rPr lang="en-US" smtClean="0"/>
+              <a:rPr lang="en-US"/>
               <a:t>Third level</a:t>
             </a:r>
           </a:p>
           <a:p>
             <a:pPr lvl="3"/>
             <a:r>
-              <a:rPr lang="en-US" smtClean="0"/>
+              <a:rPr lang="en-US"/>
               <a:t>Fourth level</a:t>
             </a:r>
           </a:p>
           <a:p>
             <a:pPr lvl="4"/>
             <a:r>
-              <a:rPr lang="en-US" smtClean="0"/>
+              <a:rPr lang="en-US"/>
               <a:t>Fifth level</a:t>
             </a:r>
-            <a:endParaRPr lang="en-US"/>
           </a:p>
         </p:txBody>
       </p:sp>
@@ -465,7 +476,7 @@
           <a:p>
             <a:fld id="{5BCAD085-E8A6-8845-BD4E-CB4CCA059FC4}" type="datetimeFigureOut">
               <a:rPr lang="en-US" smtClean="0"/>
-              <a:t>1/27/13</a:t>
+              <a:t>4/19/26</a:t>
             </a:fld>
             <a:endParaRPr lang="en-US"/>
           </a:p>
@@ -564,10 +575,9 @@
           <a:lstStyle/>
           <a:p>
             <a:r>
-              <a:rPr lang="en-US" smtClean="0"/>
+              <a:rPr lang="en-US"/>
               <a:t>Click to edit Master title style</a:t>
             </a:r>
-            <a:endParaRPr lang="en-US"/>
           </a:p>
         </p:txBody>
       </p:sp>
@@ -593,38 +603,37 @@
           <a:p>
             <a:pPr lvl="0"/>
             <a:r>
-              <a:rPr lang="en-US" smtClean="0"/>
+              <a:rPr lang="en-US"/>
               <a:t>Click to edit Master text styles</a:t>
             </a:r>
           </a:p>
           <a:p>
             <a:pPr lvl="1"/>
             <a:r>
-              <a:rPr lang="en-US" smtClean="0"/>
+              <a:rPr lang="en-US"/>
               <a:t>Second level</a:t>
             </a:r>
           </a:p>
           <a:p>
             <a:pPr lvl="2"/>
             <a:r>
-              <a:rPr lang="en-US" smtClean="0"/>
+              <a:rPr lang="en-US"/>
               <a:t>Third level</a:t>
             </a:r>
           </a:p>
           <a:p>
             <a:pPr lvl="3"/>
             <a:r>
-              <a:rPr lang="en-US" smtClean="0"/>
+              <a:rPr lang="en-US"/>
               <a:t>Fourth level</a:t>
             </a:r>
           </a:p>
           <a:p>
             <a:pPr lvl="4"/>
             <a:r>
-              <a:rPr lang="en-US" smtClean="0"/>
+              <a:rPr lang="en-US"/>
               <a:t>Fifth level</a:t>
             </a:r>
-            <a:endParaRPr lang="en-US"/>
           </a:p>
         </p:txBody>
       </p:sp>
@@ -645,7 +654,7 @@
           <a:p>
             <a:fld id="{5BCAD085-E8A6-8845-BD4E-CB4CCA059FC4}" type="datetimeFigureOut">
               <a:rPr lang="en-US" smtClean="0"/>
-              <a:t>1/27/13</a:t>
+              <a:t>4/19/26</a:t>
             </a:fld>
             <a:endParaRPr lang="en-US"/>
           </a:p>
@@ -739,10 +748,9 @@
           <a:lstStyle/>
           <a:p>
             <a:r>
-              <a:rPr lang="en-US" smtClean="0"/>
+              <a:rPr lang="en-US"/>
               <a:t>Click to edit Master title style</a:t>
             </a:r>
-            <a:endParaRPr lang="en-US"/>
           </a:p>
         </p:txBody>
       </p:sp>
@@ -763,38 +771,37 @@
           <a:p>
             <a:pPr lvl="0"/>
             <a:r>
-              <a:rPr lang="en-US" smtClean="0"/>
+              <a:rPr lang="en-US"/>
               <a:t>Click to edit Master text styles</a:t>
             </a:r>
           </a:p>
           <a:p>
             <a:pPr lvl="1"/>
             <a:r>
-              <a:rPr lang="en-US" smtClean="0"/>
+              <a:rPr lang="en-US"/>
               <a:t>Second level</a:t>
             </a:r>
           </a:p>
           <a:p>
             <a:pPr lvl="2"/>
             <a:r>
-              <a:rPr lang="en-US" smtClean="0"/>
+              <a:rPr lang="en-US"/>
               <a:t>Third level</a:t>
             </a:r>
           </a:p>
           <a:p>
             <a:pPr lvl="3"/>
             <a:r>
-              <a:rPr lang="en-US" smtClean="0"/>
+              <a:rPr lang="en-US"/>
               <a:t>Fourth level</a:t>
             </a:r>
           </a:p>
           <a:p>
             <a:pPr lvl="4"/>
             <a:r>
-              <a:rPr lang="en-US" smtClean="0"/>
+              <a:rPr lang="en-US"/>
               <a:t>Fifth level</a:t>
             </a:r>
-            <a:endParaRPr lang="en-US"/>
           </a:p>
         </p:txBody>
       </p:sp>
@@ -815,7 +822,7 @@
           <a:p>
             <a:fld id="{5BCAD085-E8A6-8845-BD4E-CB4CCA059FC4}" type="datetimeFigureOut">
               <a:rPr lang="en-US" smtClean="0"/>
-              <a:t>1/27/13</a:t>
+              <a:t>4/19/26</a:t>
             </a:fld>
             <a:endParaRPr lang="en-US"/>
           </a:p>
@@ -918,10 +925,9 @@
           </a:lstStyle>
           <a:p>
             <a:r>
-              <a:rPr lang="en-US" smtClean="0"/>
+              <a:rPr lang="en-US"/>
               <a:t>Click to edit Master title style</a:t>
             </a:r>
-            <a:endParaRPr lang="en-US"/>
           </a:p>
         </p:txBody>
       </p:sp>
@@ -1038,7 +1044,7 @@
           <a:p>
             <a:pPr lvl="0"/>
             <a:r>
-              <a:rPr lang="en-US" smtClean="0"/>
+              <a:rPr lang="en-US"/>
               <a:t>Click to edit Master text styles</a:t>
             </a:r>
           </a:p>
@@ -1061,7 +1067,7 @@
           <a:p>
             <a:fld id="{5BCAD085-E8A6-8845-BD4E-CB4CCA059FC4}" type="datetimeFigureOut">
               <a:rPr lang="en-US" smtClean="0"/>
-              <a:t>1/27/13</a:t>
+              <a:t>4/19/26</a:t>
             </a:fld>
             <a:endParaRPr lang="en-US"/>
           </a:p>
@@ -1155,10 +1161,9 @@
           <a:lstStyle/>
           <a:p>
             <a:r>
-              <a:rPr lang="en-US" smtClean="0"/>
+              <a:rPr lang="en-US"/>
               <a:t>Click to edit Master title style</a:t>
             </a:r>
-            <a:endParaRPr lang="en-US"/>
           </a:p>
         </p:txBody>
       </p:sp>
@@ -1212,38 +1217,37 @@
           <a:p>
             <a:pPr lvl="0"/>
             <a:r>
-              <a:rPr lang="en-US" smtClean="0"/>
+              <a:rPr lang="en-US"/>
               <a:t>Click to edit Master text styles</a:t>
             </a:r>
           </a:p>
           <a:p>
             <a:pPr lvl="1"/>
             <a:r>
-              <a:rPr lang="en-US" smtClean="0"/>
+              <a:rPr lang="en-US"/>
               <a:t>Second level</a:t>
             </a:r>
           </a:p>
           <a:p>
             <a:pPr lvl="2"/>
             <a:r>
-              <a:rPr lang="en-US" smtClean="0"/>
+              <a:rPr lang="en-US"/>
               <a:t>Third level</a:t>
             </a:r>
           </a:p>
           <a:p>
             <a:pPr lvl="3"/>
             <a:r>
-              <a:rPr lang="en-US" smtClean="0"/>
+              <a:rPr lang="en-US"/>
               <a:t>Fourth level</a:t>
             </a:r>
           </a:p>
           <a:p>
             <a:pPr lvl="4"/>
             <a:r>
-              <a:rPr lang="en-US" smtClean="0"/>
+              <a:rPr lang="en-US"/>
               <a:t>Fifth level</a:t>
             </a:r>
-            <a:endParaRPr lang="en-US"/>
           </a:p>
         </p:txBody>
       </p:sp>
@@ -1297,38 +1301,37 @@
           <a:p>
             <a:pPr lvl="0"/>
             <a:r>
-              <a:rPr lang="en-US" smtClean="0"/>
+              <a:rPr lang="en-US"/>
               <a:t>Click to edit Master text styles</a:t>
             </a:r>
           </a:p>
           <a:p>
             <a:pPr lvl="1"/>
             <a:r>
-              <a:rPr lang="en-US" smtClean="0"/>
+              <a:rPr lang="en-US"/>
               <a:t>Second level</a:t>
             </a:r>
           </a:p>
           <a:p>
             <a:pPr lvl="2"/>
             <a:r>
-              <a:rPr lang="en-US" smtClean="0"/>
+              <a:rPr lang="en-US"/>
               <a:t>Third level</a:t>
             </a:r>
           </a:p>
           <a:p>
             <a:pPr lvl="3"/>
             <a:r>
-              <a:rPr lang="en-US" smtClean="0"/>
+              <a:rPr lang="en-US"/>
               <a:t>Fourth level</a:t>
             </a:r>
           </a:p>
           <a:p>
             <a:pPr lvl="4"/>
             <a:r>
-              <a:rPr lang="en-US" smtClean="0"/>
+              <a:rPr lang="en-US"/>
               <a:t>Fifth level</a:t>
             </a:r>
-            <a:endParaRPr lang="en-US"/>
           </a:p>
         </p:txBody>
       </p:sp>
@@ -1349,7 +1352,7 @@
           <a:p>
             <a:fld id="{5BCAD085-E8A6-8845-BD4E-CB4CCA059FC4}" type="datetimeFigureOut">
               <a:rPr lang="en-US" smtClean="0"/>
-              <a:t>1/27/13</a:t>
+              <a:t>4/19/26</a:t>
             </a:fld>
             <a:endParaRPr lang="en-US"/>
           </a:p>
@@ -1447,10 +1450,9 @@
           </a:lstStyle>
           <a:p>
             <a:r>
-              <a:rPr lang="en-US" smtClean="0"/>
+              <a:rPr lang="en-US"/>
               <a:t>Click to edit Master title style</a:t>
             </a:r>
-            <a:endParaRPr lang="en-US"/>
           </a:p>
         </p:txBody>
       </p:sp>
@@ -1513,7 +1515,7 @@
           <a:p>
             <a:pPr lvl="0"/>
             <a:r>
-              <a:rPr lang="en-US" smtClean="0"/>
+              <a:rPr lang="en-US"/>
               <a:t>Click to edit Master text styles</a:t>
             </a:r>
           </a:p>
@@ -1569,38 +1571,37 @@
           <a:p>
             <a:pPr lvl="0"/>
             <a:r>
-              <a:rPr lang="en-US" smtClean="0"/>
+              <a:rPr lang="en-US"/>
               <a:t>Click to edit Master text styles</a:t>
             </a:r>
           </a:p>
           <a:p>
             <a:pPr lvl="1"/>
             <a:r>
-              <a:rPr lang="en-US" smtClean="0"/>
+              <a:rPr lang="en-US"/>
               <a:t>Second level</a:t>
             </a:r>
           </a:p>
           <a:p>
             <a:pPr lvl="2"/>
             <a:r>
-              <a:rPr lang="en-US" smtClean="0"/>
+              <a:rPr lang="en-US"/>
               <a:t>Third level</a:t>
             </a:r>
           </a:p>
           <a:p>
             <a:pPr lvl="3"/>
             <a:r>
-              <a:rPr lang="en-US" smtClean="0"/>
+              <a:rPr lang="en-US"/>
               <a:t>Fourth level</a:t>
             </a:r>
           </a:p>
           <a:p>
             <a:pPr lvl="4"/>
             <a:r>
-              <a:rPr lang="en-US" smtClean="0"/>
+              <a:rPr lang="en-US"/>
               <a:t>Fifth level</a:t>
             </a:r>
-            <a:endParaRPr lang="en-US"/>
           </a:p>
         </p:txBody>
       </p:sp>
@@ -1663,7 +1664,7 @@
           <a:p>
             <a:pPr lvl="0"/>
             <a:r>
-              <a:rPr lang="en-US" smtClean="0"/>
+              <a:rPr lang="en-US"/>
               <a:t>Click to edit Master text styles</a:t>
             </a:r>
           </a:p>
@@ -1719,38 +1720,37 @@
           <a:p>
             <a:pPr lvl="0"/>
             <a:r>
-              <a:rPr lang="en-US" smtClean="0"/>
+              <a:rPr lang="en-US"/>
               <a:t>Click to edit Master text styles</a:t>
             </a:r>
           </a:p>
           <a:p>
             <a:pPr lvl="1"/>
             <a:r>
-              <a:rPr lang="en-US" smtClean="0"/>
+              <a:rPr lang="en-US"/>
               <a:t>Second level</a:t>
             </a:r>
           </a:p>
           <a:p>
             <a:pPr lvl="2"/>
             <a:r>
-              <a:rPr lang="en-US" smtClean="0"/>
+              <a:rPr lang="en-US"/>
               <a:t>Third level</a:t>
             </a:r>
           </a:p>
           <a:p>
             <a:pPr lvl="3"/>
             <a:r>
-              <a:rPr lang="en-US" smtClean="0"/>
+              <a:rPr lang="en-US"/>
               <a:t>Fourth level</a:t>
             </a:r>
           </a:p>
           <a:p>
             <a:pPr lvl="4"/>
             <a:r>
-              <a:rPr lang="en-US" smtClean="0"/>
+              <a:rPr lang="en-US"/>
               <a:t>Fifth level</a:t>
             </a:r>
-            <a:endParaRPr lang="en-US"/>
           </a:p>
         </p:txBody>
       </p:sp>
@@ -1771,7 +1771,7 @@
           <a:p>
             <a:fld id="{5BCAD085-E8A6-8845-BD4E-CB4CCA059FC4}" type="datetimeFigureOut">
               <a:rPr lang="en-US" smtClean="0"/>
-              <a:t>1/27/13</a:t>
+              <a:t>4/19/26</a:t>
             </a:fld>
             <a:endParaRPr lang="en-US"/>
           </a:p>
@@ -1865,10 +1865,9 @@
           <a:lstStyle/>
           <a:p>
             <a:r>
-              <a:rPr lang="en-US" smtClean="0"/>
+              <a:rPr lang="en-US"/>
               <a:t>Click to edit Master title style</a:t>
             </a:r>
-            <a:endParaRPr lang="en-US"/>
           </a:p>
         </p:txBody>
       </p:sp>
@@ -1889,7 +1888,7 @@
           <a:p>
             <a:fld id="{5BCAD085-E8A6-8845-BD4E-CB4CCA059FC4}" type="datetimeFigureOut">
               <a:rPr lang="en-US" smtClean="0"/>
-              <a:t>1/27/13</a:t>
+              <a:t>4/19/26</a:t>
             </a:fld>
             <a:endParaRPr lang="en-US"/>
           </a:p>
@@ -1984,7 +1983,7 @@
           <a:p>
             <a:fld id="{5BCAD085-E8A6-8845-BD4E-CB4CCA059FC4}" type="datetimeFigureOut">
               <a:rPr lang="en-US" smtClean="0"/>
-              <a:t>1/27/13</a:t>
+              <a:t>4/19/26</a:t>
             </a:fld>
             <a:endParaRPr lang="en-US"/>
           </a:p>
@@ -2087,10 +2086,9 @@
           </a:lstStyle>
           <a:p>
             <a:r>
-              <a:rPr lang="en-US" smtClean="0"/>
+              <a:rPr lang="en-US"/>
               <a:t>Click to edit Master title style</a:t>
             </a:r>
-            <a:endParaRPr lang="en-US"/>
           </a:p>
         </p:txBody>
       </p:sp>
@@ -2144,38 +2142,37 @@
           <a:p>
             <a:pPr lvl="0"/>
             <a:r>
-              <a:rPr lang="en-US" smtClean="0"/>
+              <a:rPr lang="en-US"/>
               <a:t>Click to edit Master text styles</a:t>
             </a:r>
           </a:p>
           <a:p>
             <a:pPr lvl="1"/>
             <a:r>
-              <a:rPr lang="en-US" smtClean="0"/>
+              <a:rPr lang="en-US"/>
               <a:t>Second level</a:t>
             </a:r>
           </a:p>
           <a:p>
             <a:pPr lvl="2"/>
             <a:r>
-              <a:rPr lang="en-US" smtClean="0"/>
+              <a:rPr lang="en-US"/>
               <a:t>Third level</a:t>
             </a:r>
           </a:p>
           <a:p>
             <a:pPr lvl="3"/>
             <a:r>
-              <a:rPr lang="en-US" smtClean="0"/>
+              <a:rPr lang="en-US"/>
               <a:t>Fourth level</a:t>
             </a:r>
           </a:p>
           <a:p>
             <a:pPr lvl="4"/>
             <a:r>
-              <a:rPr lang="en-US" smtClean="0"/>
+              <a:rPr lang="en-US"/>
               <a:t>Fifth level</a:t>
             </a:r>
-            <a:endParaRPr lang="en-US"/>
           </a:p>
         </p:txBody>
       </p:sp>
@@ -2238,7 +2235,7 @@
           <a:p>
             <a:pPr lvl="0"/>
             <a:r>
-              <a:rPr lang="en-US" smtClean="0"/>
+              <a:rPr lang="en-US"/>
               <a:t>Click to edit Master text styles</a:t>
             </a:r>
           </a:p>
@@ -2261,7 +2258,7 @@
           <a:p>
             <a:fld id="{5BCAD085-E8A6-8845-BD4E-CB4CCA059FC4}" type="datetimeFigureOut">
               <a:rPr lang="en-US" smtClean="0"/>
-              <a:t>1/27/13</a:t>
+              <a:t>4/19/26</a:t>
             </a:fld>
             <a:endParaRPr lang="en-US"/>
           </a:p>
@@ -2364,10 +2361,9 @@
           </a:lstStyle>
           <a:p>
             <a:r>
-              <a:rPr lang="en-US" smtClean="0"/>
+              <a:rPr lang="en-US"/>
               <a:t>Click to edit Master title style</a:t>
             </a:r>
-            <a:endParaRPr lang="en-US"/>
           </a:p>
         </p:txBody>
       </p:sp>
@@ -2491,7 +2487,7 @@
           <a:p>
             <a:pPr lvl="0"/>
             <a:r>
-              <a:rPr lang="en-US" smtClean="0"/>
+              <a:rPr lang="en-US"/>
               <a:t>Click to edit Master text styles</a:t>
             </a:r>
           </a:p>
@@ -2514,7 +2510,7 @@
           <a:p>
             <a:fld id="{5BCAD085-E8A6-8845-BD4E-CB4CCA059FC4}" type="datetimeFigureOut">
               <a:rPr lang="en-US" smtClean="0"/>
-              <a:t>1/27/13</a:t>
+              <a:t>4/19/26</a:t>
             </a:fld>
             <a:endParaRPr lang="en-US"/>
           </a:p>
@@ -2623,10 +2619,9 @@
           <a:lstStyle/>
           <a:p>
             <a:r>
-              <a:rPr lang="en-US" smtClean="0"/>
+              <a:rPr lang="en-US"/>
               <a:t>Click to edit Master title style</a:t>
             </a:r>
-            <a:endParaRPr lang="en-US"/>
           </a:p>
         </p:txBody>
       </p:sp>
@@ -2657,38 +2652,37 @@
           <a:p>
             <a:pPr lvl="0"/>
             <a:r>
-              <a:rPr lang="en-US" smtClean="0"/>
+              <a:rPr lang="en-US"/>
               <a:t>Click to edit Master text styles</a:t>
             </a:r>
           </a:p>
           <a:p>
             <a:pPr lvl="1"/>
             <a:r>
-              <a:rPr lang="en-US" smtClean="0"/>
+              <a:rPr lang="en-US"/>
               <a:t>Second level</a:t>
             </a:r>
           </a:p>
           <a:p>
             <a:pPr lvl="2"/>
             <a:r>
-              <a:rPr lang="en-US" smtClean="0"/>
+              <a:rPr lang="en-US"/>
               <a:t>Third level</a:t>
             </a:r>
           </a:p>
           <a:p>
             <a:pPr lvl="3"/>
             <a:r>
-              <a:rPr lang="en-US" smtClean="0"/>
+              <a:rPr lang="en-US"/>
               <a:t>Fourth level</a:t>
             </a:r>
           </a:p>
           <a:p>
             <a:pPr lvl="4"/>
             <a:r>
-              <a:rPr lang="en-US" smtClean="0"/>
+              <a:rPr lang="en-US"/>
               <a:t>Fifth level</a:t>
             </a:r>
-            <a:endParaRPr lang="en-US"/>
           </a:p>
         </p:txBody>
       </p:sp>
@@ -2727,7 +2721,7 @@
           <a:p>
             <a:fld id="{5BCAD085-E8A6-8845-BD4E-CB4CCA059FC4}" type="datetimeFigureOut">
               <a:rPr lang="en-US" smtClean="0"/>
-              <a:t>1/27/13</a:t>
+              <a:t>4/19/26</a:t>
             </a:fld>
             <a:endParaRPr lang="en-US"/>
           </a:p>
@@ -3086,7 +3080,7 @@
 </file>
 
 <file path=ppt/slides/slide1.xml><?xml version="1.0" encoding="utf-8"?>
-<p:sld xmlns:a="http://schemas.openxmlformats.org/drawingml/2006/main" xmlns:p="http://schemas.openxmlformats.org/presentationml/2006/main" xmlns:r="http://schemas.openxmlformats.org/officeDocument/2006/relationships">
+<p:sld xmlns:a="http://schemas.openxmlformats.org/drawingml/2006/main" xmlns:r="http://schemas.openxmlformats.org/officeDocument/2006/relationships" xmlns:p="http://schemas.openxmlformats.org/presentationml/2006/main">
   <p:cSld>
     <p:spTree>
       <p:nvGrpSpPr>
@@ -3094,7 +3088,14 @@
         <p:cNvGrpSpPr/>
         <p:nvPr/>
       </p:nvGrpSpPr>
-      <p:grpSpPr/>
+      <p:grpSpPr>
+        <a:xfrm>
+          <a:off x="0" y="0"/>
+          <a:ext cx="0" cy="0"/>
+          <a:chOff x="0" y="0"/>
+          <a:chExt cx="0" cy="0"/>
+        </a:xfrm>
+      </p:grpSpPr>
       <p:sp>
         <p:nvSpPr>
           <p:cNvPr id="2" name="Rectangle 1"/>
@@ -3135,6 +3136,7 @@
           <a:lstStyle/>
           <a:p>
             <a:pPr algn="ctr"/>
+            <a:endParaRPr/>
           </a:p>
         </p:txBody>
       </p:sp>
@@ -3287,7 +3289,7 @@
 </file>
 
 <file path=ppt/slides/slide2.xml><?xml version="1.0" encoding="utf-8"?>
-<p:sld xmlns:a="http://schemas.openxmlformats.org/drawingml/2006/main" xmlns:p="http://schemas.openxmlformats.org/presentationml/2006/main" xmlns:r="http://schemas.openxmlformats.org/officeDocument/2006/relationships">
+<p:sld xmlns:a="http://schemas.openxmlformats.org/drawingml/2006/main" xmlns:r="http://schemas.openxmlformats.org/officeDocument/2006/relationships" xmlns:p="http://schemas.openxmlformats.org/presentationml/2006/main">
   <p:cSld>
     <p:spTree>
       <p:nvGrpSpPr>
@@ -3295,7 +3297,14 @@
         <p:cNvGrpSpPr/>
         <p:nvPr/>
       </p:nvGrpSpPr>
-      <p:grpSpPr/>
+      <p:grpSpPr>
+        <a:xfrm>
+          <a:off x="0" y="0"/>
+          <a:ext cx="0" cy="0"/>
+          <a:chOff x="0" y="0"/>
+          <a:chExt cx="0" cy="0"/>
+        </a:xfrm>
+      </p:grpSpPr>
       <p:sp>
         <p:nvSpPr>
           <p:cNvPr id="2" name="Rectangle 1"/>
@@ -3336,6 +3345,7 @@
           <a:lstStyle/>
           <a:p>
             <a:pPr algn="ctr"/>
+            <a:endParaRPr/>
           </a:p>
         </p:txBody>
       </p:sp>
@@ -3818,7 +3828,7 @@
 </file>
 
 <file path=ppt/slides/slide3.xml><?xml version="1.0" encoding="utf-8"?>
-<p:sld xmlns:a="http://schemas.openxmlformats.org/drawingml/2006/main" xmlns:p="http://schemas.openxmlformats.org/presentationml/2006/main" xmlns:r="http://schemas.openxmlformats.org/officeDocument/2006/relationships">
+<p:sld xmlns:a="http://schemas.openxmlformats.org/drawingml/2006/main" xmlns:r="http://schemas.openxmlformats.org/officeDocument/2006/relationships" xmlns:p="http://schemas.openxmlformats.org/presentationml/2006/main">
   <p:cSld>
     <p:spTree>
       <p:nvGrpSpPr>
@@ -3826,7 +3836,14 @@
         <p:cNvGrpSpPr/>
         <p:nvPr/>
       </p:nvGrpSpPr>
-      <p:grpSpPr/>
+      <p:grpSpPr>
+        <a:xfrm>
+          <a:off x="0" y="0"/>
+          <a:ext cx="0" cy="0"/>
+          <a:chOff x="0" y="0"/>
+          <a:chExt cx="0" cy="0"/>
+        </a:xfrm>
+      </p:grpSpPr>
       <p:sp>
         <p:nvSpPr>
           <p:cNvPr id="2" name="Rectangle 1"/>
@@ -3867,6 +3884,7 @@
           <a:lstStyle/>
           <a:p>
             <a:pPr algn="ctr"/>
+            <a:endParaRPr/>
           </a:p>
         </p:txBody>
       </p:sp>
@@ -3943,7 +3961,7 @@
           </a:fontRef>
         </p:style>
         <p:txBody>
-          <a:bodyPr rtlCol="0" anchor="ctr" tIns="137160" lIns="274320"/>
+          <a:bodyPr lIns="274320" tIns="137160" rtlCol="0" anchor="ctr"/>
           <a:lstStyle/>
           <a:p>
             <a:pPr algn="ctr">
@@ -4030,7 +4048,7 @@
           </a:fontRef>
         </p:style>
         <p:txBody>
-          <a:bodyPr rtlCol="0" anchor="ctr" tIns="137160" lIns="274320"/>
+          <a:bodyPr lIns="274320" tIns="137160" rtlCol="0" anchor="ctr"/>
           <a:lstStyle/>
           <a:p>
             <a:pPr algn="ctr">
@@ -4088,7 +4106,7 @@
 </file>
 
 <file path=ppt/slides/slide4.xml><?xml version="1.0" encoding="utf-8"?>
-<p:sld xmlns:a="http://schemas.openxmlformats.org/drawingml/2006/main" xmlns:p="http://schemas.openxmlformats.org/presentationml/2006/main" xmlns:r="http://schemas.openxmlformats.org/officeDocument/2006/relationships">
+<p:sld xmlns:a="http://schemas.openxmlformats.org/drawingml/2006/main" xmlns:r="http://schemas.openxmlformats.org/officeDocument/2006/relationships" xmlns:p="http://schemas.openxmlformats.org/presentationml/2006/main">
   <p:cSld>
     <p:spTree>
       <p:nvGrpSpPr>
@@ -4096,7 +4114,14 @@
         <p:cNvGrpSpPr/>
         <p:nvPr/>
       </p:nvGrpSpPr>
-      <p:grpSpPr/>
+      <p:grpSpPr>
+        <a:xfrm>
+          <a:off x="0" y="0"/>
+          <a:ext cx="0" cy="0"/>
+          <a:chOff x="0" y="0"/>
+          <a:chExt cx="0" cy="0"/>
+        </a:xfrm>
+      </p:grpSpPr>
       <p:sp>
         <p:nvSpPr>
           <p:cNvPr id="2" name="Rectangle 1"/>
@@ -4137,6 +4162,7 @@
           <a:lstStyle/>
           <a:p>
             <a:pPr algn="ctr"/>
+            <a:endParaRPr/>
           </a:p>
         </p:txBody>
       </p:sp>
@@ -4213,7 +4239,7 @@
           </a:fontRef>
         </p:style>
         <p:txBody>
-          <a:bodyPr rtlCol="0" anchor="ctr" tIns="137160" lIns="274320"/>
+          <a:bodyPr lIns="274320" tIns="137160" rtlCol="0" anchor="ctr"/>
           <a:lstStyle/>
           <a:p>
             <a:pPr algn="ctr">
@@ -4301,7 +4327,7 @@
 </file>
 
 <file path=ppt/slides/slide5.xml><?xml version="1.0" encoding="utf-8"?>
-<p:sld xmlns:a="http://schemas.openxmlformats.org/drawingml/2006/main" xmlns:p="http://schemas.openxmlformats.org/presentationml/2006/main" xmlns:r="http://schemas.openxmlformats.org/officeDocument/2006/relationships">
+<p:sld xmlns:a="http://schemas.openxmlformats.org/drawingml/2006/main" xmlns:r="http://schemas.openxmlformats.org/officeDocument/2006/relationships" xmlns:p="http://schemas.openxmlformats.org/presentationml/2006/main">
   <p:cSld>
     <p:spTree>
       <p:nvGrpSpPr>
@@ -4309,7 +4335,14 @@
         <p:cNvGrpSpPr/>
         <p:nvPr/>
       </p:nvGrpSpPr>
-      <p:grpSpPr/>
+      <p:grpSpPr>
+        <a:xfrm>
+          <a:off x="0" y="0"/>
+          <a:ext cx="0" cy="0"/>
+          <a:chOff x="0" y="0"/>
+          <a:chExt cx="0" cy="0"/>
+        </a:xfrm>
+      </p:grpSpPr>
       <p:sp>
         <p:nvSpPr>
           <p:cNvPr id="2" name="Rectangle 1"/>
@@ -4350,6 +4383,7 @@
           <a:lstStyle/>
           <a:p>
             <a:pPr algn="ctr"/>
+            <a:endParaRPr/>
           </a:p>
         </p:txBody>
       </p:sp>
@@ -4877,14 +4911,14 @@
       </p:sp>
       <p:sp>
         <p:nvSpPr>
-          <p:cNvPr id="15" name="TextBox 14"/>
+          <p:cNvPr id="17" name="TextBox 16"/>
           <p:cNvSpPr txBox="1"/>
           <p:nvPr/>
         </p:nvSpPr>
         <p:spPr>
           <a:xfrm>
-            <a:off x="1005840" y="3840480"/>
-            <a:ext cx="7772400" cy="457200"/>
+            <a:off x="1005840" y="3840478"/>
+            <a:ext cx="1546642" cy="338554"/>
           </a:xfrm>
           <a:prstGeom prst="rect">
             <a:avLst/>
@@ -4905,94 +4939,20 @@
               </a:defRPr>
             </a:pPr>
             <a:r>
-              <a:t>Генерация штрих-кодов</a:t>
-            </a:r>
-          </a:p>
-        </p:txBody>
-      </p:sp>
-      <p:sp>
-        <p:nvSpPr>
-          <p:cNvPr id="16" name="Oval 15"/>
-          <p:cNvSpPr/>
-          <p:nvPr/>
-        </p:nvSpPr>
-        <p:spPr>
-          <a:xfrm>
-            <a:off x="457200" y="4389120"/>
-            <a:ext cx="365760" cy="365760"/>
-          </a:xfrm>
-          <a:prstGeom prst="ellipse">
-            <a:avLst/>
-          </a:prstGeom>
-          <a:solidFill>
-            <a:srgbClr val="1C7293"/>
-          </a:solidFill>
-          <a:ln>
-            <a:noFill/>
-          </a:ln>
-        </p:spPr>
-        <p:style>
-          <a:lnRef idx="1">
-            <a:schemeClr val="accent1"/>
-          </a:lnRef>
-          <a:fillRef idx="3">
-            <a:schemeClr val="accent1"/>
-          </a:fillRef>
-          <a:effectRef idx="2">
-            <a:schemeClr val="accent1"/>
-          </a:effectRef>
-          <a:fontRef idx="minor">
-            <a:schemeClr val="lt1"/>
-          </a:fontRef>
-        </p:style>
-        <p:txBody>
-          <a:bodyPr rtlCol="0" anchor="ctr"/>
-          <a:lstStyle/>
-          <a:p>
-            <a:pPr algn="ctr">
-              <a:defRPr sz="1400" b="1">
-                <a:solidFill>
-                  <a:srgbClr val="FFFFFF"/>
-                </a:solidFill>
-              </a:defRPr>
-            </a:pPr>
-            <a:r>
-              <a:t>7</a:t>
-            </a:r>
-          </a:p>
-        </p:txBody>
-      </p:sp>
-      <p:sp>
-        <p:nvSpPr>
-          <p:cNvPr id="17" name="TextBox 16"/>
-          <p:cNvSpPr txBox="1"/>
-          <p:nvPr/>
-        </p:nvSpPr>
-        <p:spPr>
-          <a:xfrm>
-            <a:off x="1005840" y="4389120"/>
-            <a:ext cx="7772400" cy="457200"/>
-          </a:xfrm>
-          <a:prstGeom prst="rect">
-            <a:avLst/>
-          </a:prstGeom>
-          <a:noFill/>
-        </p:spPr>
-        <p:txBody>
-          <a:bodyPr wrap="none">
-            <a:spAutoFit/>
-          </a:bodyPr>
-          <a:lstStyle/>
-          <a:p>
-            <a:pPr>
-              <a:defRPr sz="1600">
-                <a:solidFill>
-                  <a:srgbClr val="FFFFFF"/>
-                </a:solidFill>
-              </a:defRPr>
-            </a:pPr>
-            <a:r>
-              <a:t>Экспорт в JSON и XLSX</a:t>
+              <a:rPr dirty="0" err="1"/>
+              <a:t>Экспорт</a:t>
+            </a:r>
+            <a:r>
+              <a:rPr dirty="0"/>
+              <a:t> </a:t>
+            </a:r>
+            <a:r>
+              <a:rPr dirty="0" err="1"/>
+              <a:t>в</a:t>
+            </a:r>
+            <a:r>
+              <a:rPr dirty="0"/>
+              <a:t> JSON</a:t>
             </a:r>
           </a:p>
         </p:txBody>
@@ -5006,7 +4966,7 @@
 </file>
 
 <file path=ppt/slides/slide6.xml><?xml version="1.0" encoding="utf-8"?>
-<p:sld xmlns:a="http://schemas.openxmlformats.org/drawingml/2006/main" xmlns:p="http://schemas.openxmlformats.org/presentationml/2006/main" xmlns:r="http://schemas.openxmlformats.org/officeDocument/2006/relationships">
+<p:sld xmlns:a="http://schemas.openxmlformats.org/drawingml/2006/main" xmlns:r="http://schemas.openxmlformats.org/officeDocument/2006/relationships" xmlns:p="http://schemas.openxmlformats.org/presentationml/2006/main">
   <p:cSld>
     <p:spTree>
       <p:nvGrpSpPr>
@@ -5014,7 +4974,14 @@
         <p:cNvGrpSpPr/>
         <p:nvPr/>
       </p:nvGrpSpPr>
-      <p:grpSpPr/>
+      <p:grpSpPr>
+        <a:xfrm>
+          <a:off x="0" y="0"/>
+          <a:ext cx="0" cy="0"/>
+          <a:chOff x="0" y="0"/>
+          <a:chExt cx="0" cy="0"/>
+        </a:xfrm>
+      </p:grpSpPr>
       <p:sp>
         <p:nvSpPr>
           <p:cNvPr id="2" name="Rectangle 1"/>
@@ -5055,6 +5022,7 @@
           <a:lstStyle/>
           <a:p>
             <a:pPr algn="ctr"/>
+            <a:endParaRPr/>
           </a:p>
         </p:txBody>
       </p:sp>
@@ -5102,7 +5070,7 @@
         <p:spPr>
           <a:xfrm>
             <a:off x="457200" y="1097280"/>
-            <a:ext cx="8229600" cy="1371600"/>
+            <a:ext cx="8229600" cy="1028700"/>
           </a:xfrm>
           <a:prstGeom prst="roundRect">
             <a:avLst/>
@@ -5131,7 +5099,7 @@
           </a:fontRef>
         </p:style>
         <p:txBody>
-          <a:bodyPr rtlCol="0" anchor="ctr" tIns="137160" lIns="274320"/>
+          <a:bodyPr lIns="274320" tIns="137160" rtlCol="0" anchor="ctr"/>
           <a:lstStyle/>
           <a:p>
             <a:pPr algn="ctr">
@@ -5173,8 +5141,8 @@
         </p:nvSpPr>
         <p:spPr>
           <a:xfrm>
-            <a:off x="457200" y="2743200"/>
-            <a:ext cx="8229600" cy="1371600"/>
+            <a:off x="457200" y="2401294"/>
+            <a:ext cx="8229600" cy="970059"/>
           </a:xfrm>
           <a:prstGeom prst="roundRect">
             <a:avLst/>
@@ -5203,7 +5171,7 @@
           </a:fontRef>
         </p:style>
         <p:txBody>
-          <a:bodyPr rtlCol="0" anchor="ctr" tIns="137160" lIns="274320"/>
+          <a:bodyPr lIns="274320" tIns="137160" rtlCol="0" anchor="ctr"/>
           <a:lstStyle/>
           <a:p>
             <a:pPr algn="ctr">
@@ -5245,8 +5213,8 @@
         </p:nvSpPr>
         <p:spPr>
           <a:xfrm>
-            <a:off x="457200" y="4389120"/>
-            <a:ext cx="8229600" cy="1371600"/>
+            <a:off x="457200" y="3686920"/>
+            <a:ext cx="8229600" cy="1141012"/>
           </a:xfrm>
           <a:prstGeom prst="roundRect">
             <a:avLst/>
@@ -5275,7 +5243,7 @@
           </a:fontRef>
         </p:style>
         <p:txBody>
-          <a:bodyPr rtlCol="0" anchor="ctr" tIns="137160" lIns="274320"/>
+          <a:bodyPr lIns="274320" tIns="137160" rtlCol="0" anchor="ctr"/>
           <a:lstStyle/>
           <a:p>
             <a:pPr algn="ctr">
@@ -5318,7 +5286,7 @@
 </file>
 
 <file path=ppt/slides/slide7.xml><?xml version="1.0" encoding="utf-8"?>
-<p:sld xmlns:a="http://schemas.openxmlformats.org/drawingml/2006/main" xmlns:p="http://schemas.openxmlformats.org/presentationml/2006/main" xmlns:r="http://schemas.openxmlformats.org/officeDocument/2006/relationships">
+<p:sld xmlns:a="http://schemas.openxmlformats.org/drawingml/2006/main" xmlns:r="http://schemas.openxmlformats.org/officeDocument/2006/relationships" xmlns:p="http://schemas.openxmlformats.org/presentationml/2006/main">
   <p:cSld>
     <p:spTree>
       <p:nvGrpSpPr>
@@ -5326,7 +5294,14 @@
         <p:cNvGrpSpPr/>
         <p:nvPr/>
       </p:nvGrpSpPr>
-      <p:grpSpPr/>
+      <p:grpSpPr>
+        <a:xfrm>
+          <a:off x="0" y="0"/>
+          <a:ext cx="0" cy="0"/>
+          <a:chOff x="0" y="0"/>
+          <a:chExt cx="0" cy="0"/>
+        </a:xfrm>
+      </p:grpSpPr>
       <p:sp>
         <p:nvSpPr>
           <p:cNvPr id="2" name="Rectangle 1"/>
@@ -5367,498 +5342,7 @@
           <a:lstStyle/>
           <a:p>
             <a:pPr algn="ctr"/>
-          </a:p>
-        </p:txBody>
-      </p:sp>
-      <p:sp>
-        <p:nvSpPr>
-          <p:cNvPr id="3" name="TextBox 2"/>
-          <p:cNvSpPr txBox="1"/>
-          <p:nvPr/>
-        </p:nvSpPr>
-        <p:spPr>
-          <a:xfrm>
-            <a:off x="457200" y="274320"/>
-            <a:ext cx="8229600" cy="731520"/>
-          </a:xfrm>
-          <a:prstGeom prst="rect">
-            <a:avLst/>
-          </a:prstGeom>
-          <a:noFill/>
-        </p:spPr>
-        <p:txBody>
-          <a:bodyPr wrap="none">
-            <a:spAutoFit/>
-          </a:bodyPr>
-          <a:lstStyle/>
-          <a:p>
-            <a:pPr>
-              <a:defRPr sz="3600" b="1">
-                <a:solidFill>
-                  <a:srgbClr val="FFFFFF"/>
-                </a:solidFill>
-              </a:defRPr>
-            </a:pPr>
-            <a:r>
-              <a:t>Критерии оценки</a:t>
-            </a:r>
-          </a:p>
-        </p:txBody>
-      </p:sp>
-      <p:sp>
-        <p:nvSpPr>
-          <p:cNvPr id="4" name="Rounded Rectangle 3"/>
-          <p:cNvSpPr/>
-          <p:nvPr/>
-        </p:nvSpPr>
-        <p:spPr>
-          <a:xfrm>
-            <a:off x="457200" y="1371600"/>
-            <a:ext cx="2560320" cy="1371600"/>
-          </a:xfrm>
-          <a:prstGeom prst="roundRect">
-            <a:avLst/>
-          </a:prstGeom>
-          <a:solidFill>
-            <a:srgbClr val="065A82"/>
-          </a:solidFill>
-          <a:ln>
-            <a:solidFill>
-              <a:srgbClr val="1C7293"/>
-            </a:solidFill>
-          </a:ln>
-        </p:spPr>
-        <p:style>
-          <a:lnRef idx="1">
-            <a:schemeClr val="accent1"/>
-          </a:lnRef>
-          <a:fillRef idx="3">
-            <a:schemeClr val="accent1"/>
-          </a:fillRef>
-          <a:effectRef idx="2">
-            <a:schemeClr val="accent1"/>
-          </a:effectRef>
-          <a:fontRef idx="minor">
-            <a:schemeClr val="lt1"/>
-          </a:fontRef>
-        </p:style>
-        <p:txBody>
-          <a:bodyPr rtlCol="0" anchor="ctr"/>
-          <a:lstStyle/>
-          <a:p>
-            <a:pPr algn="ctr">
-              <a:defRPr sz="3200" b="1">
-                <a:solidFill>
-                  <a:srgbClr val="FFFFFF"/>
-                </a:solidFill>
-              </a:defRPr>
-            </a:pPr>
-            <a:r>
-              <a:t>0-4</a:t>
-            </a:r>
-          </a:p>
-          <a:p>
-            <a:pPr algn="ctr">
-              <a:defRPr sz="1200">
-                <a:solidFill>
-                  <a:srgbClr val="808080"/>
-                </a:solidFill>
-              </a:defRPr>
-            </a:pPr>
-            <a:r>
-              <a:t>Точность распознавания</a:t>
-            </a:r>
-          </a:p>
-        </p:txBody>
-      </p:sp>
-      <p:sp>
-        <p:nvSpPr>
-          <p:cNvPr id="5" name="Rounded Rectangle 4"/>
-          <p:cNvSpPr/>
-          <p:nvPr/>
-        </p:nvSpPr>
-        <p:spPr>
-          <a:xfrm>
-            <a:off x="3200400" y="1371600"/>
-            <a:ext cx="2560320" cy="1371600"/>
-          </a:xfrm>
-          <a:prstGeom prst="roundRect">
-            <a:avLst/>
-          </a:prstGeom>
-          <a:solidFill>
-            <a:srgbClr val="065A82"/>
-          </a:solidFill>
-          <a:ln>
-            <a:solidFill>
-              <a:srgbClr val="1C7293"/>
-            </a:solidFill>
-          </a:ln>
-        </p:spPr>
-        <p:style>
-          <a:lnRef idx="1">
-            <a:schemeClr val="accent1"/>
-          </a:lnRef>
-          <a:fillRef idx="3">
-            <a:schemeClr val="accent1"/>
-          </a:fillRef>
-          <a:effectRef idx="2">
-            <a:schemeClr val="accent1"/>
-          </a:effectRef>
-          <a:fontRef idx="minor">
-            <a:schemeClr val="lt1"/>
-          </a:fontRef>
-        </p:style>
-        <p:txBody>
-          <a:bodyPr rtlCol="0" anchor="ctr"/>
-          <a:lstStyle/>
-          <a:p>
-            <a:pPr algn="ctr">
-              <a:defRPr sz="3200" b="1">
-                <a:solidFill>
-                  <a:srgbClr val="FFFFFF"/>
-                </a:solidFill>
-              </a:defRPr>
-            </a:pPr>
-            <a:r>
-              <a:t>0-2</a:t>
-            </a:r>
-          </a:p>
-          <a:p>
-            <a:pPr algn="ctr">
-              <a:defRPr sz="1200">
-                <a:solidFill>
-                  <a:srgbClr val="808080"/>
-                </a:solidFill>
-              </a:defRPr>
-            </a:pPr>
-            <a:r>
-              <a:t>Полнота извлеченной информации</a:t>
-            </a:r>
-          </a:p>
-        </p:txBody>
-      </p:sp>
-      <p:sp>
-        <p:nvSpPr>
-          <p:cNvPr id="6" name="Rounded Rectangle 5"/>
-          <p:cNvSpPr/>
-          <p:nvPr/>
-        </p:nvSpPr>
-        <p:spPr>
-          <a:xfrm>
-            <a:off x="5943600" y="1371600"/>
-            <a:ext cx="2560320" cy="1371600"/>
-          </a:xfrm>
-          <a:prstGeom prst="roundRect">
-            <a:avLst/>
-          </a:prstGeom>
-          <a:solidFill>
-            <a:srgbClr val="065A82"/>
-          </a:solidFill>
-          <a:ln>
-            <a:solidFill>
-              <a:srgbClr val="1C7293"/>
-            </a:solidFill>
-          </a:ln>
-        </p:spPr>
-        <p:style>
-          <a:lnRef idx="1">
-            <a:schemeClr val="accent1"/>
-          </a:lnRef>
-          <a:fillRef idx="3">
-            <a:schemeClr val="accent1"/>
-          </a:fillRef>
-          <a:effectRef idx="2">
-            <a:schemeClr val="accent1"/>
-          </a:effectRef>
-          <a:fontRef idx="minor">
-            <a:schemeClr val="lt1"/>
-          </a:fontRef>
-        </p:style>
-        <p:txBody>
-          <a:bodyPr rtlCol="0" anchor="ctr"/>
-          <a:lstStyle/>
-          <a:p>
-            <a:pPr algn="ctr">
-              <a:defRPr sz="3200" b="1">
-                <a:solidFill>
-                  <a:srgbClr val="FFFFFF"/>
-                </a:solidFill>
-              </a:defRPr>
-            </a:pPr>
-            <a:r>
-              <a:t>0-2</a:t>
-            </a:r>
-          </a:p>
-          <a:p>
-            <a:pPr algn="ctr">
-              <a:defRPr sz="1200">
-                <a:solidFill>
-                  <a:srgbClr val="808080"/>
-                </a:solidFill>
-              </a:defRPr>
-            </a:pPr>
-            <a:r>
-              <a:t>Удобство интерфейса</a:t>
-            </a:r>
-          </a:p>
-        </p:txBody>
-      </p:sp>
-      <p:sp>
-        <p:nvSpPr>
-          <p:cNvPr id="7" name="Rounded Rectangle 6"/>
-          <p:cNvSpPr/>
-          <p:nvPr/>
-        </p:nvSpPr>
-        <p:spPr>
-          <a:xfrm>
-            <a:off x="457200" y="3017520"/>
-            <a:ext cx="2560320" cy="1371600"/>
-          </a:xfrm>
-          <a:prstGeom prst="roundRect">
-            <a:avLst/>
-          </a:prstGeom>
-          <a:solidFill>
-            <a:srgbClr val="065A82"/>
-          </a:solidFill>
-          <a:ln>
-            <a:solidFill>
-              <a:srgbClr val="1C7293"/>
-            </a:solidFill>
-          </a:ln>
-        </p:spPr>
-        <p:style>
-          <a:lnRef idx="1">
-            <a:schemeClr val="accent1"/>
-          </a:lnRef>
-          <a:fillRef idx="3">
-            <a:schemeClr val="accent1"/>
-          </a:fillRef>
-          <a:effectRef idx="2">
-            <a:schemeClr val="accent1"/>
-          </a:effectRef>
-          <a:fontRef idx="minor">
-            <a:schemeClr val="lt1"/>
-          </a:fontRef>
-        </p:style>
-        <p:txBody>
-          <a:bodyPr rtlCol="0" anchor="ctr"/>
-          <a:lstStyle/>
-          <a:p>
-            <a:pPr algn="ctr">
-              <a:defRPr sz="3200" b="1">
-                <a:solidFill>
-                  <a:srgbClr val="FFFFFF"/>
-                </a:solidFill>
-              </a:defRPr>
-            </a:pPr>
-            <a:r>
-              <a:t>0-2</a:t>
-            </a:r>
-          </a:p>
-          <a:p>
-            <a:pPr algn="ctr">
-              <a:defRPr sz="1200">
-                <a:solidFill>
-                  <a:srgbClr val="808080"/>
-                </a:solidFill>
-              </a:defRPr>
-            </a:pPr>
-            <a:r>
-              <a:t>Процент ошибок</a:t>
-            </a:r>
-          </a:p>
-        </p:txBody>
-      </p:sp>
-      <p:sp>
-        <p:nvSpPr>
-          <p:cNvPr id="8" name="Rounded Rectangle 7"/>
-          <p:cNvSpPr/>
-          <p:nvPr/>
-        </p:nvSpPr>
-        <p:spPr>
-          <a:xfrm>
-            <a:off x="3200400" y="3017520"/>
-            <a:ext cx="2560320" cy="1371600"/>
-          </a:xfrm>
-          <a:prstGeom prst="roundRect">
-            <a:avLst/>
-          </a:prstGeom>
-          <a:solidFill>
-            <a:srgbClr val="065A82"/>
-          </a:solidFill>
-          <a:ln>
-            <a:solidFill>
-              <a:srgbClr val="1C7293"/>
-            </a:solidFill>
-          </a:ln>
-        </p:spPr>
-        <p:style>
-          <a:lnRef idx="1">
-            <a:schemeClr val="accent1"/>
-          </a:lnRef>
-          <a:fillRef idx="3">
-            <a:schemeClr val="accent1"/>
-          </a:fillRef>
-          <a:effectRef idx="2">
-            <a:schemeClr val="accent1"/>
-          </a:effectRef>
-          <a:fontRef idx="minor">
-            <a:schemeClr val="lt1"/>
-          </a:fontRef>
-        </p:style>
-        <p:txBody>
-          <a:bodyPr rtlCol="0" anchor="ctr"/>
-          <a:lstStyle/>
-          <a:p>
-            <a:pPr algn="ctr">
-              <a:defRPr sz="3200" b="1">
-                <a:solidFill>
-                  <a:srgbClr val="FFFFFF"/>
-                </a:solidFill>
-              </a:defRPr>
-            </a:pPr>
-            <a:r>
-              <a:t>+1</a:t>
-            </a:r>
-          </a:p>
-          <a:p>
-            <a:pPr algn="ctr">
-              <a:defRPr sz="1200">
-                <a:solidFill>
-                  <a:srgbClr val="808080"/>
-                </a:solidFill>
-              </a:defRPr>
-            </a:pPr>
-            <a:r>
-              <a:t>Работа в 1С</a:t>
-            </a:r>
-          </a:p>
-        </p:txBody>
-      </p:sp>
-      <p:sp>
-        <p:nvSpPr>
-          <p:cNvPr id="9" name="Rounded Rectangle 8"/>
-          <p:cNvSpPr/>
-          <p:nvPr/>
-        </p:nvSpPr>
-        <p:spPr>
-          <a:xfrm>
-            <a:off x="5943600" y="3017520"/>
-            <a:ext cx="2560320" cy="1371600"/>
-          </a:xfrm>
-          <a:prstGeom prst="roundRect">
-            <a:avLst/>
-          </a:prstGeom>
-          <a:solidFill>
-            <a:srgbClr val="065A82"/>
-          </a:solidFill>
-          <a:ln>
-            <a:solidFill>
-              <a:srgbClr val="1C7293"/>
-            </a:solidFill>
-          </a:ln>
-        </p:spPr>
-        <p:style>
-          <a:lnRef idx="1">
-            <a:schemeClr val="accent1"/>
-          </a:lnRef>
-          <a:fillRef idx="3">
-            <a:schemeClr val="accent1"/>
-          </a:fillRef>
-          <a:effectRef idx="2">
-            <a:schemeClr val="accent1"/>
-          </a:effectRef>
-          <a:fontRef idx="minor">
-            <a:schemeClr val="lt1"/>
-          </a:fontRef>
-        </p:style>
-        <p:txBody>
-          <a:bodyPr rtlCol="0" anchor="ctr"/>
-          <a:lstStyle/>
-          <a:p>
-            <a:pPr algn="ctr">
-              <a:defRPr sz="3200" b="1">
-                <a:solidFill>
-                  <a:srgbClr val="FFFFFF"/>
-                </a:solidFill>
-              </a:defRPr>
-            </a:pPr>
-            <a:r>
-              <a:t>+1</a:t>
-            </a:r>
-          </a:p>
-          <a:p>
-            <a:pPr algn="ctr">
-              <a:defRPr sz="1200">
-                <a:solidFill>
-                  <a:srgbClr val="808080"/>
-                </a:solidFill>
-              </a:defRPr>
-            </a:pPr>
-            <a:r>
-              <a:t>Чек-листы и интеграция</a:t>
-            </a:r>
-          </a:p>
-        </p:txBody>
-      </p:sp>
-    </p:spTree>
-  </p:cSld>
-  <p:clrMapOvr>
-    <a:masterClrMapping/>
-  </p:clrMapOvr>
-</p:sld>
-</file>
-
-<file path=ppt/slides/slide8.xml><?xml version="1.0" encoding="utf-8"?>
-<p:sld xmlns:a="http://schemas.openxmlformats.org/drawingml/2006/main" xmlns:p="http://schemas.openxmlformats.org/presentationml/2006/main" xmlns:r="http://schemas.openxmlformats.org/officeDocument/2006/relationships">
-  <p:cSld>
-    <p:spTree>
-      <p:nvGrpSpPr>
-        <p:cNvPr id="1" name=""/>
-        <p:cNvGrpSpPr/>
-        <p:nvPr/>
-      </p:nvGrpSpPr>
-      <p:grpSpPr/>
-      <p:sp>
-        <p:nvSpPr>
-          <p:cNvPr id="2" name="Rectangle 1"/>
-          <p:cNvSpPr/>
-          <p:nvPr/>
-        </p:nvSpPr>
-        <p:spPr>
-          <a:xfrm>
-            <a:off x="0" y="0"/>
-            <a:ext cx="9144000" cy="5143500"/>
-          </a:xfrm>
-          <a:prstGeom prst="rect">
-            <a:avLst/>
-          </a:prstGeom>
-          <a:solidFill>
-            <a:srgbClr val="21295C"/>
-          </a:solidFill>
-          <a:ln>
-            <a:noFill/>
-          </a:ln>
-        </p:spPr>
-        <p:style>
-          <a:lnRef idx="1">
-            <a:schemeClr val="accent1"/>
-          </a:lnRef>
-          <a:fillRef idx="3">
-            <a:schemeClr val="accent1"/>
-          </a:fillRef>
-          <a:effectRef idx="2">
-            <a:schemeClr val="accent1"/>
-          </a:effectRef>
-          <a:fontRef idx="minor">
-            <a:schemeClr val="lt1"/>
-          </a:fontRef>
-        </p:style>
-        <p:txBody>
-          <a:bodyPr rtlCol="0" anchor="ctr"/>
-          <a:lstStyle/>
-          <a:p>
-            <a:pPr algn="ctr"/>
+            <a:endParaRPr/>
           </a:p>
         </p:txBody>
       </p:sp>
